--- a/assets/pptx/catalog-299.pptx
+++ b/assets/pptx/catalog-299.pptx
@@ -3420,7 +3420,7 @@
                 <a:ea typeface="Ebrima"/>
                 <a:cs typeface="Ebrima"/>
               </a:rPr>
-              <a:t>ያንተ በመሆኔ (2x)</a:t>
+              <a:t>ያንተ በመሆኔ 2x</a:t>
             </a:r>
           </a:p>
         </p:txBody>
@@ -3662,7 +3662,7 @@
                 <a:ea typeface="Ebrima"/>
                 <a:cs typeface="Ebrima"/>
               </a:rPr>
-              <a:t>ያንተ በመሆኔ (2x)</a:t>
+              <a:t>ያንተ በመሆኔ 2x</a:t>
             </a:r>
           </a:p>
         </p:txBody>
@@ -3783,7 +3783,7 @@
                 <a:ea typeface="Ebrima"/>
                 <a:cs typeface="Ebrima"/>
               </a:rPr>
-              <a:t>ያንተ በመሆኔ (2x)</a:t>
+              <a:t>ያንተ በመሆኔ 2x</a:t>
             </a:r>
           </a:p>
         </p:txBody>
